--- a/3-Master_Plan/re_entry/HEROs_and_PASSes/slides/auto/CHAR_PD22_drafted_minutes_audit_AUTO.pptx
+++ b/3-Master_Plan/re_entry/HEROs_and_PASSes/slides/auto/CHAR_PD22_drafted_minutes_audit_AUTO.pptx
@@ -3145,7 +3145,7 @@
               <a:rPr sz="1000" b="0" i="0" baseline="0">
                 <a:latin typeface="Calibri"/>
               </a:rPr>
-              <a:t>PD22 · drafted retention audit · 2011-2021 · at min 20 drop: 1133/1177 drafted player-seasons kept</a:t>
+              <a:t>PD22 · drafted retention audit · 2011-2021 · at min $20$ drop: $1,133/1,177$ drafted player-seasons kept</a:t>
             </a:r>
           </a:p>
         </p:txBody>
@@ -3212,7 +3212,7 @@
               <a:rPr sz="1000" b="0" i="0" baseline="0">
                 <a:latin typeface="Calibri"/>
               </a:rPr>
-              <a:t>  PD22 item 1 (Alex Aug 2026): audit minutes floor before defending min 20 min or PPM-zero bench policy.</a:t>
+              <a:t>  PD22 item 1: audit minutes floor before defending min 20 min or PPM-zero bench policy.</a:t>
             </a:r>
           </a:p>
           <a:p>
@@ -3252,7 +3252,7 @@
               <a:rPr sz="1000" b="0" i="0" baseline="0">
                 <a:latin typeface="Calibri"/>
               </a:rPr>
-              <a:t>  Box QC at panel build: drop dash-name placeholders; keep team-seasons with $\geq$11 distinct games in box (frozen CSV untouched).</a:t>
+              <a:t>  Box QC at panel build: drop dash-name placeholders; keep team-seasons with $\geq 11$ distinct games in box (frozen CSV untouched).</a:t>
             </a:r>
           </a:p>
           <a:p>
@@ -3272,7 +3272,7 @@
               <a:rPr sz="1000" b="0" i="0" baseline="0">
                 <a:latin typeface="Calibri"/>
               </a:rPr>
-              <a:t>  Drafted player-seasons: 1,177 (521 unique athletes).</a:t>
+              <a:t>  Drafted player-seasons: $1,177$ ($521$ unique athletes).</a:t>
             </a:r>
           </a:p>
           <a:p>
@@ -3292,7 +3292,7 @@
               <a:rPr sz="1000" b="0" i="0" baseline="0">
                 <a:latin typeface="Calibri"/>
               </a:rPr>
-              <a:t>  Minutes among drafted: min = 0; draft-safe max floor (drop) $\approx 0$ min.</a:t>
+              <a:t>  Minutes among drafted: min = $0$; draft-safe max floor (drop) $\approx 0$ min.</a:t>
             </a:r>
           </a:p>
           <a:p>
@@ -3312,7 +3312,7 @@
               <a:rPr sz="1000" b="0" i="0" baseline="0">
                 <a:latin typeface="Calibri"/>
               </a:rPr>
-              <a:t>  Hero lock min = 20: retain 1,133 / 1,177; lose 44 player-seasons (42 unique athletes; 42 at 0 min).</a:t>
+              <a:t>  Hero lock min = $20$: retain $1,133/1,177$; lose $44$ player-seasons ($42$ unique athletes; $42$ at $0$ min).</a:t>
             </a:r>
           </a:p>
           <a:p>
@@ -3372,7 +3372,7 @@
               <a:rPr sz="1000" b="0" i="0" baseline="0">
                 <a:latin typeface="Calibri"/>
               </a:rPr>
-              <a:t>  Lost at min 20 drop (44): id 51323 (2013): 0.0 min; id 56359 (2013): 0.0 min; id 56965 (2014): 0.0 min (+41 more — see CSV)</a:t>
+              <a:t>  Lost at min $20$ drop ($44$): id 51323 (2013): 0.0 min; id 56359 (2013): 0.0 min; id 56965 (2014): 0.0 min (+41 more — see CSV)</a:t>
             </a:r>
           </a:p>
           <a:p>
@@ -3392,7 +3392,7 @@
               <a:rPr sz="1000" b="0" i="0" baseline="0">
                 <a:latin typeface="Calibri"/>
               </a:rPr>
-              <a:t>  Left: empirical cumulative distribution function (ECDF) of drafted minutes (10 min teal, 20 min red). Right: retained count vs floor.</a:t>
+              <a:t>  Left: empirical cumulative distribution function (ECDF) of drafted minutes ($10$ min teal, $20$ min red). Right: retained count vs floor.</a:t>
             </a:r>
           </a:p>
         </p:txBody>
@@ -3424,7 +3424,7 @@
               <a:rPr sz="1100" b="1" i="0" baseline="0">
                 <a:latin typeface="Calibri"/>
               </a:rPr>
-              <a:t>Claim (Alex, PD22): Playing-time floor must be draft-safe — retain every ever-draft ($Y_{\mathrm{draft}}=1$) player-season before we justify min 20 min or PPM-zero bench policy for $\rho$ / $H_{\mathrm{sort}}$ calibration.</a:t>
+              <a:t>Claim (PD22): Playing-time floor must be draft-safe — retain every ever-draft ($Y_{\mathrm{draft}}=1$) player-season before we justify min 20 min or PPM-zero bench policy for $\rho$ / $H_{\mathrm{sort}}$ calibration.</a:t>
             </a:r>
           </a:p>
         </p:txBody>
